--- a/COMP110/Lectures/Chapter9/Chapter9.pptx
+++ b/COMP110/Lectures/Chapter9/Chapter9.pptx
@@ -283,7 +283,7 @@
           <a:p>
             <a:fld id="{3A4C0F8E-31BD-4D8E-8C4F-C25B04B9591E}" type="datetimeFigureOut">
               <a:rPr lang="en-US" smtClean="0"/>
-              <a:t>4/16/2025</a:t>
+              <a:t>4/21/2025</a:t>
             </a:fld>
             <a:endParaRPr lang="en-US"/>
           </a:p>
@@ -465,7 +465,7 @@
             <a:fld id="{9FF82490-4016-48B2-8AFA-F88003C3FC9E}" type="datetimeFigureOut">
               <a:rPr lang="en-US" altLang="en-US"/>
               <a:pPr/>
-              <a:t>4/16/2025</a:t>
+              <a:t>4/21/2025</a:t>
             </a:fld>
             <a:endParaRPr lang="en-US" altLang="en-US"/>
           </a:p>
@@ -8462,7 +8462,7 @@
           <a:graphicData uri="http://schemas.openxmlformats.org/presentationml/2006/ole">
             <mc:AlternateContent xmlns:mc="http://schemas.openxmlformats.org/markup-compatibility/2006">
               <mc:Choice xmlns:v="urn:schemas-microsoft-com:vml" Requires="v">
-                <p:oleObj spid="_x0000_s6154" r:id="rId4" imgW="4648200" imgH="2057400" progId="Word.Picture.8">
+                <p:oleObj spid="_x0000_s6159" r:id="rId4" imgW="4648200" imgH="2057400" progId="Word.Picture.8">
                   <p:embed/>
                 </p:oleObj>
               </mc:Choice>
@@ -8644,14 +8644,14 @@
           <p:nvPr>
             <p:extLst>
               <p:ext uri="{D42A27DB-BD31-4B8C-83A1-F6EECF244321}">
-                <p14:modId xmlns:p14="http://schemas.microsoft.com/office/powerpoint/2010/main" val="2082009479"/>
+                <p14:modId xmlns:p14="http://schemas.microsoft.com/office/powerpoint/2010/main" val="4034464118"/>
               </p:ext>
             </p:extLst>
           </p:nvPr>
         </p:nvGraphicFramePr>
         <p:xfrm>
           <a:off x="1066800" y="1440296"/>
-          <a:ext cx="6096000" cy="3470148"/>
+          <a:ext cx="6096000" cy="3078798"/>
         </p:xfrm>
         <a:graphic>
           <a:graphicData uri="http://schemas.openxmlformats.org/drawingml/2006/table">
@@ -8728,15 +8728,15 @@
                         </a:spcAft>
                       </a:pPr>
                       <a:r>
-                        <a:rPr lang="en-US" sz="2400">
+                        <a:rPr lang="en-US" sz="2400" dirty="0">
                           <a:effectLst/>
                           <a:latin typeface="Calibri" panose="020F0502020204030204" pitchFamily="34" charset="0"/>
                           <a:ea typeface="Calibri" panose="020F0502020204030204" pitchFamily="34" charset="0"/>
                           <a:cs typeface="Times New Roman" panose="02020603050405020304" pitchFamily="18" charset="0"/>
                         </a:rPr>
-                        <a:t>-Radius : double</a:t>
+                        <a:t>-radius : double</a:t>
                       </a:r>
-                      <a:endParaRPr lang="en-US" sz="1100">
+                      <a:endParaRPr lang="en-US" sz="1100" dirty="0">
                         <a:effectLst/>
                         <a:latin typeface="Calibri" panose="020F0502020204030204" pitchFamily="34" charset="0"/>
                         <a:ea typeface="Calibri" panose="020F0502020204030204" pitchFamily="34" charset="0"/>
@@ -8823,52 +8823,6 @@
                           <a:cs typeface="Times New Roman" panose="02020603050405020304" pitchFamily="18" charset="0"/>
                         </a:rPr>
                         <a:t>: double)</a:t>
-                      </a:r>
-                      <a:endParaRPr lang="en-US" sz="1100" dirty="0">
-                        <a:effectLst/>
-                        <a:latin typeface="Calibri" panose="020F0502020204030204" pitchFamily="34" charset="0"/>
-                        <a:ea typeface="Calibri" panose="020F0502020204030204" pitchFamily="34" charset="0"/>
-                        <a:cs typeface="Times New Roman" panose="02020603050405020304" pitchFamily="18" charset="0"/>
-                      </a:endParaRPr>
-                    </a:p>
-                    <a:p>
-                      <a:pPr marL="0" marR="0">
-                        <a:lnSpc>
-                          <a:spcPct val="107000"/>
-                        </a:lnSpc>
-                        <a:spcBef>
-                          <a:spcPts val="0"/>
-                        </a:spcBef>
-                        <a:spcAft>
-                          <a:spcPts val="0"/>
-                        </a:spcAft>
-                      </a:pPr>
-                      <a:r>
-                        <a:rPr lang="en-US" sz="2400" dirty="0">
-                          <a:effectLst/>
-                          <a:latin typeface="Calibri" panose="020F0502020204030204" pitchFamily="34" charset="0"/>
-                          <a:ea typeface="Calibri" panose="020F0502020204030204" pitchFamily="34" charset="0"/>
-                          <a:cs typeface="Times New Roman" panose="02020603050405020304" pitchFamily="18" charset="0"/>
-                        </a:rPr>
-                        <a:t>+</a:t>
-                      </a:r>
-                      <a:r>
-                        <a:rPr lang="en-US" sz="2400" dirty="0" err="1">
-                          <a:effectLst/>
-                          <a:latin typeface="Calibri" panose="020F0502020204030204" pitchFamily="34" charset="0"/>
-                          <a:ea typeface="Calibri" panose="020F0502020204030204" pitchFamily="34" charset="0"/>
-                          <a:cs typeface="Times New Roman" panose="02020603050405020304" pitchFamily="18" charset="0"/>
-                        </a:rPr>
-                        <a:t>getArea</a:t>
-                      </a:r>
-                      <a:r>
-                        <a:rPr lang="en-US" sz="2400" dirty="0">
-                          <a:effectLst/>
-                          <a:latin typeface="Calibri" panose="020F0502020204030204" pitchFamily="34" charset="0"/>
-                          <a:ea typeface="Calibri" panose="020F0502020204030204" pitchFamily="34" charset="0"/>
-                          <a:cs typeface="Times New Roman" panose="02020603050405020304" pitchFamily="18" charset="0"/>
-                        </a:rPr>
-                        <a:t>(): double</a:t>
                       </a:r>
                       <a:endParaRPr lang="en-US" sz="1100" dirty="0">
                         <a:effectLst/>
@@ -14996,7 +14950,7 @@
           <a:graphicData uri="http://schemas.openxmlformats.org/presentationml/2006/ole">
             <mc:AlternateContent xmlns:mc="http://schemas.openxmlformats.org/markup-compatibility/2006">
               <mc:Choice xmlns:v="urn:schemas-microsoft-com:vml" Requires="v">
-                <p:oleObj spid="_x0000_s1039" name="Picture" r:id="rId4" imgW="4006596" imgH="1571244" progId="Word.Picture.8">
+                <p:oleObj spid="_x0000_s1044" name="Picture" r:id="rId4" imgW="4006596" imgH="1571244" progId="Word.Picture.8">
                   <p:embed/>
                 </p:oleObj>
               </mc:Choice>
@@ -17021,7 +16975,7 @@
           <a:graphicData uri="http://schemas.openxmlformats.org/presentationml/2006/ole">
             <mc:AlternateContent xmlns:mc="http://schemas.openxmlformats.org/markup-compatibility/2006">
               <mc:Choice xmlns:v="urn:schemas-microsoft-com:vml" Requires="v">
-                <p:oleObj spid="_x0000_s2063" name="Picture" r:id="rId3" imgW="4877309" imgH="1734154" progId="Word.Picture.8">
+                <p:oleObj spid="_x0000_s2068" name="Picture" r:id="rId3" imgW="4877309" imgH="1734154" progId="Word.Picture.8">
                   <p:embed/>
                 </p:oleObj>
               </mc:Choice>
@@ -17601,22 +17555,28 @@
           <p:cNvGraphicFramePr>
             <a:graphicFrameLocks noChangeAspect="1"/>
           </p:cNvGraphicFramePr>
-          <p:nvPr/>
+          <p:nvPr>
+            <p:extLst>
+              <p:ext uri="{D42A27DB-BD31-4B8C-83A1-F6EECF244321}">
+                <p14:modId xmlns:p14="http://schemas.microsoft.com/office/powerpoint/2010/main" val="3693171299"/>
+              </p:ext>
+            </p:extLst>
+          </p:nvPr>
         </p:nvGraphicFramePr>
         <p:xfrm>
-          <a:off x="11113" y="1892300"/>
-          <a:ext cx="8924925" cy="3175000"/>
+          <a:off x="14288" y="1890713"/>
+          <a:ext cx="8916987" cy="3178175"/>
         </p:xfrm>
         <a:graphic>
           <a:graphicData uri="http://schemas.openxmlformats.org/presentationml/2006/ole">
             <mc:AlternateContent xmlns:mc="http://schemas.openxmlformats.org/markup-compatibility/2006">
               <mc:Choice xmlns:v="urn:schemas-microsoft-com:vml" Requires="v">
-                <p:oleObj spid="_x0000_s3087" name="Picture" r:id="rId3" imgW="4877309" imgH="1734154" progId="Word.Picture.8">
+                <p:oleObj spid="_x0000_s3092" name="Picture" r:id="rId3" imgW="4872143" imgH="1734804" progId="Word.Picture.8">
                   <p:embed/>
                 </p:oleObj>
               </mc:Choice>
               <mc:Fallback>
-                <p:oleObj name="Picture" r:id="rId3" imgW="4877309" imgH="1734154" progId="Word.Picture.8">
+                <p:oleObj name="Picture" r:id="rId3" imgW="4872143" imgH="1734804" progId="Word.Picture.8">
                   <p:embed/>
                   <p:pic>
                     <p:nvPicPr>
@@ -17633,13 +17593,7 @@
                       <p:nvPr/>
                     </p:nvPicPr>
                     <p:blipFill>
-                      <a:blip r:embed="rId4">
-                        <a:extLst>
-                          <a:ext uri="{28A0092B-C50C-407E-A947-70E740481C1C}">
-                            <a14:useLocalDpi xmlns:a14="http://schemas.microsoft.com/office/drawing/2010/main" val="0"/>
-                          </a:ext>
-                        </a:extLst>
-                      </a:blip>
+                      <a:blip r:embed="rId4"/>
                       <a:srcRect/>
                       <a:stretch>
                         <a:fillRect/>
@@ -17647,8 +17601,8 @@
                     </p:blipFill>
                     <p:spPr bwMode="auto">
                       <a:xfrm>
-                        <a:off x="11113" y="1892300"/>
-                        <a:ext cx="8924925" cy="3175000"/>
+                        <a:off x="14288" y="1890713"/>
+                        <a:ext cx="8916987" cy="3178175"/>
                       </a:xfrm>
                       <a:prstGeom prst="rect">
                         <a:avLst/>
@@ -17892,9 +17846,10 @@
               <a:buNone/>
             </a:pPr>
             <a:r>
-              <a:rPr lang="en-US" altLang="en-US" sz="2000" dirty="0"/>
-              <a:t>Circle</a:t>
-            </a:r>
+              <a:rPr lang="en-US" altLang="en-US" sz="2000" dirty="0" err="1"/>
+              <a:t>CircleWithStaticDataFields</a:t>
+            </a:r>
+            <a:endParaRPr lang="en-US" altLang="en-US" sz="2000" dirty="0"/>
           </a:p>
         </p:txBody>
       </p:sp>
@@ -18102,13 +18057,24 @@
               </a:spcBef>
               <a:buClrTx/>
               <a:buSzTx/>
+              <a:buNone/>
+            </a:pPr>
+            <a:r>
+              <a:rPr lang="en-US" altLang="en-US" sz="2000" dirty="0" err="1"/>
+              <a:t>TestCircleWithStaticDataFields</a:t>
+            </a:r>
+            <a:endParaRPr lang="en-US" altLang="en-US" sz="2000" dirty="0"/>
+          </a:p>
+          <a:p>
+            <a:pPr algn="ctr">
+              <a:spcBef>
+                <a:spcPct val="0"/>
+              </a:spcBef>
+              <a:buClrTx/>
+              <a:buSzTx/>
               <a:buFontTx/>
               <a:buNone/>
             </a:pPr>
-            <a:r>
-              <a:rPr lang="en-US" altLang="en-US" sz="2000" dirty="0" err="1"/>
-              <a:t>TestCircle</a:t>
-            </a:r>
             <a:endParaRPr lang="en-US" altLang="en-US" sz="2000" dirty="0"/>
           </a:p>
         </p:txBody>
@@ -19211,7 +19177,7 @@
           <a:graphicData uri="http://schemas.openxmlformats.org/presentationml/2006/ole">
             <mc:AlternateContent xmlns:mc="http://schemas.openxmlformats.org/markup-compatibility/2006">
               <mc:Choice xmlns:v="urn:schemas-microsoft-com:vml" Requires="v">
-                <p:oleObj spid="_x0000_s7176" name="Picture" r:id="rId5" imgW="5118100" imgH="1625600" progId="Word.Picture.8">
+                <p:oleObj spid="_x0000_s7181" name="Picture" r:id="rId5" imgW="5118100" imgH="1625600" progId="Word.Picture.8">
                   <p:embed/>
                 </p:oleObj>
               </mc:Choice>
@@ -20823,7 +20789,7 @@
           <a:graphicData uri="http://schemas.openxmlformats.org/presentationml/2006/ole">
             <mc:AlternateContent xmlns:mc="http://schemas.openxmlformats.org/markup-compatibility/2006">
               <mc:Choice xmlns:v="urn:schemas-microsoft-com:vml" Requires="v">
-                <p:oleObj spid="_x0000_s8200" name="Picture" r:id="rId5" imgW="3390900" imgH="1993900" progId="Word.Picture.8">
+                <p:oleObj spid="_x0000_s8205" name="Picture" r:id="rId5" imgW="3390900" imgH="1993900" progId="Word.Picture.8">
                   <p:embed/>
                 </p:oleObj>
               </mc:Choice>
